--- a/malitski/BS_Profiler_3.1_презентация.pptx
+++ b/malitski/BS_Profiler_3.1_презентация.pptx
@@ -14,9 +14,10 @@
     <p:sldId id="262" r:id="rId8"/>
     <p:sldId id="263" r:id="rId9"/>
     <p:sldId id="264" r:id="rId10"/>
+    <p:sldId id="265" r:id="rId11"/>
   </p:sldIdLst>
   <p:notesMasterIdLst>
-    <p:notesMasterId r:id="rId11"/>
+    <p:notesMasterId r:id="rId12"/>
   </p:notesMasterIdLst>
   <p:sldSz cx="12192000" cy="6858000"/>
   <p:notesSz cx="6858000" cy="12192000"/>
@@ -534,6 +535,94 @@
             <a:fld id="{F7021451-1387-4CA6-816F-3879F97B5CBC}" type="slidenum">
               <a:rPr lang="en-US"/>
               <a:t>1</a:t>
+            </a:fld>
+            <a:endParaRPr lang="en-US"/>
+          </a:p>
+        </p:txBody>
+      </p:sp>
+    </p:spTree>
+    <p:extLst>
+      <p:ext uri="{BB962C8B-B14F-4D97-AF65-F5344CB8AC3E}">
+        <p14:creationId xmlns:p14="http://schemas.microsoft.com/office/powerpoint/2010/main" val="1024086991"/>
+      </p:ext>
+    </p:extLst>
+  </p:cSld>
+  <p:clrMapOvr>
+    <a:masterClrMapping/>
+  </p:clrMapOvr>
+</p:notes>
+</file>
+
+<file path=ppt/notesSlides/notesSlide10.xml><?xml version="1.0" encoding="utf-8"?>
+<p:notes xmlns:a="http://schemas.openxmlformats.org/drawingml/2006/main" xmlns:r="http://schemas.openxmlformats.org/officeDocument/2006/relationships" xmlns:p="http://schemas.openxmlformats.org/presentationml/2006/main">
+  <p:cSld>
+    <p:spTree>
+      <p:nvGrpSpPr>
+        <p:cNvPr id="1" name=""/>
+        <p:cNvGrpSpPr/>
+        <p:nvPr/>
+      </p:nvGrpSpPr>
+      <p:grpSpPr>
+        <a:xfrm>
+          <a:off x="0" y="0"/>
+          <a:ext cx="0" cy="0"/>
+          <a:chOff x="0" y="0"/>
+          <a:chExt cx="0" cy="0"/>
+        </a:xfrm>
+      </p:grpSpPr>
+      <p:sp>
+        <p:nvSpPr>
+          <p:cNvPr id="2" name="Slide Image Placeholder 1"/>
+          <p:cNvSpPr>
+            <a:spLocks noGrp="1" noRot="1" noChangeAspect="1"/>
+          </p:cNvSpPr>
+          <p:nvPr>
+            <p:ph type="sldImg"/>
+          </p:nvPr>
+        </p:nvSpPr>
+        <p:spPr/>
+      </p:sp>
+      <p:sp>
+        <p:nvSpPr>
+          <p:cNvPr id="3" name="Notes Placeholder 2"/>
+          <p:cNvSpPr>
+            <a:spLocks noGrp="1"/>
+          </p:cNvSpPr>
+          <p:nvPr>
+            <p:ph type="body" idx="1"/>
+          </p:nvPr>
+        </p:nvSpPr>
+        <p:spPr/>
+        <p:txBody>
+          <a:bodyPr/>
+          <a:lstStyle/>
+          <a:p>
+            <a:r>
+              <a:rPr lang="en-US" dirty="0"/>
+              <a:t>Что разрешают авторы моделей и данных (не юридическая консультация; при коммерческом использовании условия проверяются у правообладателей). Код OCEAN-AI — под лицензией BSD-3-Clause: можно использовать, изменять и распространять, в том числе в коммерческом продукте, сохраняя копирайт и текст лицензии. Данные First Impressions V2, на которых обучена наша модель AMLAI 1.0, — под CC BY-NC 4.0: можно использовать, изменять и делиться с указанием авторства, но только некоммерчески. Русский корпус MuPTA, на котором обучены веса OCEAN-AI для русской речи, выдаётся авторами по запросу только для исследований — некоммерческое научное использование. Готовые кодировщики признаков свободные: CLIP и Whisper — MIT; CLAP, Qwen2.5-VL, ViT-выражения и MediaPipe — Apache-2.0 (в том числе коммерчески); при этом модель голоса wav2vec2 (audeering) — CC BY-NC-SA 4.0 и openSMILE — некоммерческие, EmoRoBERTa — без явной лицензии, перевод opus-mt — CC BY 4.0. Итог: сам код свободный, но оценки Big Five получены весами, обученными на некоммерческих данных, и часть моделей тоже некоммерческие, поэтому продавать продукт на этих весах нельзя; для коммерческого использования нужен собственный размеченный датасет, обучение на котором снимает эти ограничения.</a:t>
+            </a:r>
+            <a:endParaRPr lang="en-US" dirty="0"/>
+          </a:p>
+        </p:txBody>
+      </p:sp>
+      <p:sp>
+        <p:nvSpPr>
+          <p:cNvPr id="4" name="Slide Number Placeholder 3"/>
+          <p:cNvSpPr>
+            <a:spLocks noGrp="1"/>
+          </p:cNvSpPr>
+          <p:nvPr>
+            <p:ph type="sldNum" sz="quarter" idx="10"/>
+          </p:nvPr>
+        </p:nvSpPr>
+        <p:spPr/>
+        <p:txBody>
+          <a:bodyPr/>
+          <a:lstStyle/>
+          <a:p>
+            <a:fld id="{F7021451-1387-4CA6-816F-3879F97B5CBC}" type="slidenum">
+              <a:rPr lang="en-US"/>
+              <a:t>10</a:t>
             </a:fld>
             <a:endParaRPr lang="en-US"/>
           </a:p>
@@ -3313,6 +3402,1495 @@
 </p:sld>
 </file>
 
+<file path=ppt/slides/slide10.xml><?xml version="1.0" encoding="utf-8"?>
+<p:sld xmlns:a="http://schemas.openxmlformats.org/drawingml/2006/main" xmlns:r="http://schemas.openxmlformats.org/officeDocument/2006/relationships" xmlns:p="http://schemas.openxmlformats.org/presentationml/2006/main">
+  <p:cSld name="Slide 10">
+    <p:bg>
+      <p:bgPr>
+        <a:solidFill>
+          <a:srgbClr val="EEF1F4"/>
+        </a:solidFill>
+      </p:bgPr>
+    </p:bg>
+    <p:spTree>
+      <p:nvGrpSpPr>
+        <p:cNvPr id="1" name=""/>
+        <p:cNvGrpSpPr/>
+        <p:nvPr/>
+      </p:nvGrpSpPr>
+      <p:grpSpPr>
+        <a:xfrm>
+          <a:off x="0" y="0"/>
+          <a:ext cx="0" cy="0"/>
+          <a:chOff x="0" y="0"/>
+          <a:chExt cx="0" cy="0"/>
+        </a:xfrm>
+      </p:grpSpPr>
+      <p:sp>
+        <p:nvSpPr>
+          <p:cNvPr id="2" name="Text 0"/>
+          <p:cNvSpPr/>
+          <p:nvPr/>
+        </p:nvSpPr>
+        <p:spPr>
+          <a:xfrm>
+            <a:off x="812800" y="812800"/>
+            <a:ext cx="10883392" cy="236008"/>
+          </a:xfrm>
+          <a:prstGeom prst="rect">
+            <a:avLst/>
+          </a:prstGeom>
+          <a:noFill/>
+          <a:ln/>
+        </p:spPr>
+        <p:txBody>
+          <a:bodyPr wrap="square" lIns="0" tIns="0" rIns="0" bIns="0" rtlCol="0" anchor="t">
+            <a:normAutofit/>
+          </a:bodyPr>
+          <a:lstStyle/>
+          <a:p>
+            <a:pPr algn="l" indent="0" marL="0">
+              <a:lnSpc>
+                <a:spcPts val="1675"/>
+              </a:lnSpc>
+              <a:buNone/>
+            </a:pPr>
+            <a:r>
+              <a:rPr lang="en-US" sz="1196" b="1" spc="100" kern="0" dirty="0">
+                <a:solidFill>
+                  <a:srgbClr val="C2410C"/>
+                </a:solidFill>
+                <a:latin typeface="IBM Plex Sans" pitchFamily="34" charset="0"/>
+                <a:ea typeface="IBM Plex Sans" pitchFamily="34" charset="-122"/>
+                <a:cs typeface="IBM Plex Sans" pitchFamily="34" charset="-120"/>
+              </a:rPr>
+              <a:t>ЛИЦЕНЗИИ</a:t>
+            </a:r>
+            <a:endParaRPr lang="en-US" sz="1196" dirty="0"/>
+          </a:p>
+        </p:txBody>
+      </p:sp>
+      <p:sp>
+        <p:nvSpPr>
+          <p:cNvPr id="3" name="Text 1"/>
+          <p:cNvSpPr/>
+          <p:nvPr/>
+        </p:nvSpPr>
+        <p:spPr>
+          <a:xfrm>
+            <a:off x="812800" y="1163110"/>
+            <a:ext cx="10883392" cy="439076"/>
+          </a:xfrm>
+          <a:prstGeom prst="rect">
+            <a:avLst/>
+          </a:prstGeom>
+          <a:noFill/>
+          <a:ln/>
+        </p:spPr>
+        <p:txBody>
+          <a:bodyPr wrap="square" lIns="0" tIns="0" rIns="0" bIns="0" rtlCol="0" anchor="t">
+            <a:normAutofit/>
+          </a:bodyPr>
+          <a:lstStyle/>
+          <a:p>
+            <a:pPr algn="l" indent="0" marL="0">
+              <a:lnSpc>
+                <a:spcPts val="3269"/>
+              </a:lnSpc>
+              <a:buNone/>
+            </a:pPr>
+            <a:r>
+              <a:rPr lang="en-US" sz="2972" b="1" dirty="0">
+                <a:solidFill>
+                  <a:srgbClr val="16202E"/>
+                </a:solidFill>
+                <a:latin typeface="Rubik" pitchFamily="34" charset="0"/>
+                <a:ea typeface="Rubik" pitchFamily="34" charset="-122"/>
+                <a:cs typeface="Rubik" pitchFamily="34" charset="-120"/>
+              </a:rPr>
+              <a:t>Что разрешено с моделями и данными</a:t>
+            </a:r>
+            <a:endParaRPr lang="en-US" sz="2972" dirty="0"/>
+          </a:p>
+        </p:txBody>
+      </p:sp>
+      <p:sp>
+        <p:nvSpPr>
+          <p:cNvPr id="4" name="Text 2"/>
+          <p:cNvSpPr/>
+          <p:nvPr/>
+        </p:nvSpPr>
+        <p:spPr>
+          <a:xfrm>
+            <a:off x="812800" y="1716484"/>
+            <a:ext cx="10883392" cy="245401"/>
+          </a:xfrm>
+          <a:prstGeom prst="rect">
+            <a:avLst/>
+          </a:prstGeom>
+          <a:noFill/>
+          <a:ln/>
+        </p:spPr>
+        <p:txBody>
+          <a:bodyPr wrap="square" lIns="0" tIns="0" rIns="0" bIns="0" rtlCol="0" anchor="t">
+            <a:normAutofit/>
+          </a:bodyPr>
+          <a:lstStyle/>
+          <a:p>
+            <a:pPr algn="l" indent="0" marL="0">
+              <a:lnSpc>
+                <a:spcPts val="1755"/>
+              </a:lnSpc>
+              <a:buNone/>
+            </a:pPr>
+            <a:r>
+              <a:rPr lang="en-US" sz="1300" dirty="0">
+                <a:solidFill>
+                  <a:srgbClr val="4A5568"/>
+                </a:solidFill>
+                <a:latin typeface="IBM Plex Sans" pitchFamily="34" charset="0"/>
+                <a:ea typeface="IBM Plex Sans" pitchFamily="34" charset="-122"/>
+                <a:cs typeface="IBM Plex Sans" pitchFamily="34" charset="-120"/>
+              </a:rPr>
+              <a:t>Код — свободный; данные и веса — некоммерческие. Для коммерческого продукта нужен свой размеченный датасет</a:t>
+            </a:r>
+            <a:endParaRPr lang="en-US" sz="1300" dirty="0"/>
+          </a:p>
+        </p:txBody>
+      </p:sp>
+      <p:sp>
+        <p:nvSpPr>
+          <p:cNvPr id="5" name="Shape 3"/>
+          <p:cNvSpPr/>
+          <p:nvPr/>
+        </p:nvSpPr>
+        <p:spPr>
+          <a:xfrm>
+            <a:off x="812800" y="2076190"/>
+            <a:ext cx="10566400" cy="2496807"/>
+          </a:xfrm>
+          <a:custGeom>
+            <a:avLst/>
+            <a:gdLst/>
+            <a:ahLst/>
+            <a:cxnLst/>
+            <a:rect l="l" t="t" r="r" b="b"/>
+            <a:pathLst>
+              <a:path w="10566400" h="2496807">
+                <a:moveTo>
+                  <a:pt x="88900" y="2496807"/>
+                </a:moveTo>
+                <a:lnTo>
+                  <a:pt x="88900" y="2496807"/>
+                </a:lnTo>
+                <a:arcTo hR="88900" wR="88900" stAng="5400000" swAng="5400000"/>
+                <a:lnTo>
+                  <a:pt x="0" y="88900"/>
+                </a:lnTo>
+                <a:arcTo hR="88900" wR="88900" stAng="10800000" swAng="5400000"/>
+                <a:lnTo>
+                  <a:pt x="10477500" y="0"/>
+                </a:lnTo>
+                <a:arcTo hR="88900" wR="88900" stAng="16200000" swAng="5400000"/>
+                <a:lnTo>
+                  <a:pt x="10566400" y="88900"/>
+                </a:lnTo>
+                <a:arcTo hR="76200" wR="88900" stAng="0" swAng="-5400000"/>
+                <a:lnTo>
+                  <a:pt x="88900" y="12700"/>
+                </a:lnTo>
+                <a:arcTo hR="76200" wR="76200" stAng="16200000" swAng="-5400000"/>
+                <a:lnTo>
+                  <a:pt x="12700" y="2407907"/>
+                </a:lnTo>
+                <a:arcTo hR="88900" wR="76200" stAng="10800000" swAng="-5400000"/>
+                <a:close/>
+              </a:path>
+            </a:pathLst>
+          </a:custGeom>
+          <a:solidFill>
+            <a:srgbClr val="141413">
+              <a:alpha val="22000"/>
+            </a:srgbClr>
+          </a:solidFill>
+          <a:ln/>
+        </p:spPr>
+      </p:sp>
+      <p:graphicFrame>
+        <p:nvGraphicFramePr>
+          <p:cNvPr id="6" name="Table 0"/>
+          <p:cNvGraphicFramePr>
+            <a:graphicFrameLocks noGrp="1"/>
+          </p:cNvGraphicFramePr>
+          <p:nvPr>
+            <p:extLst>
+              <p:ext uri="{D42A27DB-BD31-4B8C-83A1-F6EECF244321}">
+                <p14:modId xmlns:p14="http://schemas.microsoft.com/office/powerpoint/2010/main" val="1579011935"/>
+              </p:ext>
+            </p:extLst>
+          </p:nvPr>
+        </p:nvGraphicFramePr>
+        <p:xfrm>
+          <a:off x="825500" y="2088890"/>
+          <a:ext cx="10553700" cy="2484107"/>
+        </p:xfrm>
+        <a:graphic>
+          <a:graphicData uri="http://schemas.openxmlformats.org/drawingml/2006/table">
+            <a:tbl>
+              <a:tblPr/>
+              <a:tblGrid>
+                <a:gridCol w="3166110"/>
+                <a:gridCol w="2532888"/>
+                <a:gridCol w="4854702"/>
+              </a:tblGrid>
+              <a:tr h="328811">
+                <a:tc>
+                  <a:txBody>
+                    <a:bodyPr/>
+                    <a:lstStyle/>
+                    <a:p>
+                      <a:pPr indent="0" marL="0">
+                        <a:lnSpc>
+                          <a:spcPts val="1654"/>
+                        </a:lnSpc>
+                        <a:buNone/>
+                      </a:pPr>
+                      <a:r>
+                        <a:rPr lang="en-US" sz="1181" b="1" dirty="0">
+                          <a:solidFill>
+                            <a:srgbClr val="F2F0EA"/>
+                          </a:solidFill>
+                          <a:latin typeface="IBM Plex Sans" pitchFamily="34" charset="0"/>
+                          <a:ea typeface="IBM Plex Sans" pitchFamily="34" charset="-122"/>
+                          <a:cs typeface="IBM Plex Sans" pitchFamily="34" charset="-120"/>
+                        </a:rPr>
+                        <a:t>Компонент</a:t>
+                      </a:r>
+                      <a:endParaRPr lang="en-US" sz="1181" dirty="0">
+                        <a:latin typeface="IBM Plex Sans" charset="0"/>
+                        <a:ea typeface="IBM Plex Sans" charset="0"/>
+                        <a:cs typeface="IBM Plex Sans" charset="0"/>
+                      </a:endParaRPr>
+                    </a:p>
+                  </a:txBody>
+                  <a:tcPr marL="52507" marR="52507" marT="52507" marB="52507" anchor="t">
+                    <a:lnL w="0" cap="flat" cmpd="sng" algn="ctr">
+                      <a:noFill/>
+                    </a:lnL>
+                    <a:lnR w="12700" cap="flat" cmpd="sng" algn="ctr">
+                      <a:solidFill>
+                        <a:srgbClr val="161D28"/>
+                      </a:solidFill>
+                      <a:prstDash val="solid"/>
+                      <a:round/>
+                      <a:headEnd type="none" w="med" len="med"/>
+                      <a:tailEnd type="none" w="med" len="med"/>
+                    </a:lnR>
+                    <a:lnT w="0" cap="flat" cmpd="sng" algn="ctr">
+                      <a:noFill/>
+                    </a:lnT>
+                    <a:lnB w="12700" cap="flat" cmpd="sng" algn="ctr">
+                      <a:solidFill>
+                        <a:srgbClr val="161D28"/>
+                      </a:solidFill>
+                      <a:prstDash val="solid"/>
+                      <a:round/>
+                      <a:headEnd type="none" w="med" len="med"/>
+                      <a:tailEnd type="none" w="med" len="med"/>
+                    </a:lnB>
+                    <a:solidFill>
+                      <a:srgbClr val="16202E"/>
+                    </a:solidFill>
+                  </a:tcPr>
+                </a:tc>
+                <a:tc>
+                  <a:txBody>
+                    <a:bodyPr/>
+                    <a:lstStyle/>
+                    <a:p>
+                      <a:pPr indent="0" marL="0">
+                        <a:lnSpc>
+                          <a:spcPts val="1654"/>
+                        </a:lnSpc>
+                        <a:buNone/>
+                      </a:pPr>
+                      <a:r>
+                        <a:rPr lang="en-US" sz="1181" b="1" dirty="0">
+                          <a:solidFill>
+                            <a:srgbClr val="F2F0EA"/>
+                          </a:solidFill>
+                          <a:latin typeface="IBM Plex Sans" pitchFamily="34" charset="0"/>
+                          <a:ea typeface="IBM Plex Sans" pitchFamily="34" charset="-122"/>
+                          <a:cs typeface="IBM Plex Sans" pitchFamily="34" charset="-120"/>
+                        </a:rPr>
+                        <a:t>Лицензия</a:t>
+                      </a:r>
+                      <a:endParaRPr lang="en-US" sz="1181" dirty="0">
+                        <a:latin typeface="IBM Plex Sans" charset="0"/>
+                        <a:ea typeface="IBM Plex Sans" charset="0"/>
+                        <a:cs typeface="IBM Plex Sans" charset="0"/>
+                      </a:endParaRPr>
+                    </a:p>
+                  </a:txBody>
+                  <a:tcPr marL="52507" marR="52507" marT="52507" marB="52507" anchor="t">
+                    <a:lnL w="12700" cap="flat" cmpd="sng" algn="ctr">
+                      <a:solidFill>
+                        <a:srgbClr val="161D28"/>
+                      </a:solidFill>
+                      <a:prstDash val="solid"/>
+                      <a:round/>
+                      <a:headEnd type="none" w="med" len="med"/>
+                      <a:tailEnd type="none" w="med" len="med"/>
+                    </a:lnL>
+                    <a:lnR w="12700" cap="flat" cmpd="sng" algn="ctr">
+                      <a:solidFill>
+                        <a:srgbClr val="161D28"/>
+                      </a:solidFill>
+                      <a:prstDash val="solid"/>
+                      <a:round/>
+                      <a:headEnd type="none" w="med" len="med"/>
+                      <a:tailEnd type="none" w="med" len="med"/>
+                    </a:lnR>
+                    <a:lnT w="0" cap="flat" cmpd="sng" algn="ctr">
+                      <a:noFill/>
+                    </a:lnT>
+                    <a:lnB w="12700" cap="flat" cmpd="sng" algn="ctr">
+                      <a:solidFill>
+                        <a:srgbClr val="161D28"/>
+                      </a:solidFill>
+                      <a:prstDash val="solid"/>
+                      <a:round/>
+                      <a:headEnd type="none" w="med" len="med"/>
+                      <a:tailEnd type="none" w="med" len="med"/>
+                    </a:lnB>
+                    <a:solidFill>
+                      <a:srgbClr val="16202E"/>
+                    </a:solidFill>
+                  </a:tcPr>
+                </a:tc>
+                <a:tc>
+                  <a:txBody>
+                    <a:bodyPr/>
+                    <a:lstStyle/>
+                    <a:p>
+                      <a:pPr indent="0" marL="0">
+                        <a:lnSpc>
+                          <a:spcPts val="1654"/>
+                        </a:lnSpc>
+                        <a:buNone/>
+                      </a:pPr>
+                      <a:r>
+                        <a:rPr lang="en-US" sz="1181" b="1" dirty="0">
+                          <a:solidFill>
+                            <a:srgbClr val="F2F0EA"/>
+                          </a:solidFill>
+                          <a:latin typeface="IBM Plex Sans" pitchFamily="34" charset="0"/>
+                          <a:ea typeface="IBM Plex Sans" pitchFamily="34" charset="-122"/>
+                          <a:cs typeface="IBM Plex Sans" pitchFamily="34" charset="-120"/>
+                        </a:rPr>
+                        <a:t>Что разрешают авторы</a:t>
+                      </a:r>
+                      <a:endParaRPr lang="en-US" sz="1181" dirty="0">
+                        <a:latin typeface="IBM Plex Sans" charset="0"/>
+                        <a:ea typeface="IBM Plex Sans" charset="0"/>
+                        <a:cs typeface="IBM Plex Sans" charset="0"/>
+                      </a:endParaRPr>
+                    </a:p>
+                  </a:txBody>
+                  <a:tcPr marL="52507" marR="52507" marT="52507" marB="52507" anchor="t">
+                    <a:lnL w="12700" cap="flat" cmpd="sng" algn="ctr">
+                      <a:solidFill>
+                        <a:srgbClr val="161D28"/>
+                      </a:solidFill>
+                      <a:prstDash val="solid"/>
+                      <a:round/>
+                      <a:headEnd type="none" w="med" len="med"/>
+                      <a:tailEnd type="none" w="med" len="med"/>
+                    </a:lnL>
+                    <a:lnR w="12700" cap="flat" cmpd="sng" algn="ctr">
+                      <a:solidFill>
+                        <a:srgbClr val="161D28"/>
+                      </a:solidFill>
+                      <a:prstDash val="solid"/>
+                      <a:round/>
+                      <a:headEnd type="none" w="med" len="med"/>
+                      <a:tailEnd type="none" w="med" len="med"/>
+                    </a:lnR>
+                    <a:lnT w="0" cap="flat" cmpd="sng" algn="ctr">
+                      <a:noFill/>
+                    </a:lnT>
+                    <a:lnB w="12700" cap="flat" cmpd="sng" algn="ctr">
+                      <a:solidFill>
+                        <a:srgbClr val="161D28"/>
+                      </a:solidFill>
+                      <a:prstDash val="solid"/>
+                      <a:round/>
+                      <a:headEnd type="none" w="med" len="med"/>
+                      <a:tailEnd type="none" w="med" len="med"/>
+                    </a:lnB>
+                    <a:solidFill>
+                      <a:srgbClr val="16202E"/>
+                    </a:solidFill>
+                  </a:tcPr>
+                </a:tc>
+              </a:tr>
+              <a:tr h="538824">
+                <a:tc>
+                  <a:txBody>
+                    <a:bodyPr/>
+                    <a:lstStyle/>
+                    <a:p>
+                      <a:pPr indent="0" marL="0">
+                        <a:lnSpc>
+                          <a:spcPts val="1654"/>
+                        </a:lnSpc>
+                        <a:buNone/>
+                      </a:pPr>
+                      <a:r>
+                        <a:rPr lang="en-US" sz="1181" dirty="0">
+                          <a:solidFill>
+                            <a:srgbClr val="16202E"/>
+                          </a:solidFill>
+                          <a:latin typeface="IBM Plex Sans" pitchFamily="34" charset="0"/>
+                          <a:ea typeface="IBM Plex Sans" pitchFamily="34" charset="-122"/>
+                          <a:cs typeface="IBM Plex Sans" pitchFamily="34" charset="-120"/>
+                        </a:rPr>
+                        <a:t>OCEAN-AI, код</a:t>
+                      </a:r>
+                      <a:endParaRPr lang="en-US" sz="1181" dirty="0">
+                        <a:latin typeface="IBM Plex Sans" charset="0"/>
+                        <a:ea typeface="IBM Plex Sans" charset="0"/>
+                        <a:cs typeface="IBM Plex Sans" charset="0"/>
+                      </a:endParaRPr>
+                    </a:p>
+                  </a:txBody>
+                  <a:tcPr marL="52507" marR="52507" marT="52507" marB="52507" anchor="t">
+                    <a:lnL w="0" cap="flat" cmpd="sng" algn="ctr">
+                      <a:noFill/>
+                    </a:lnL>
+                    <a:lnR w="12700" cap="flat" cmpd="sng" algn="ctr">
+                      <a:solidFill>
+                        <a:srgbClr val="CAC9C6"/>
+                      </a:solidFill>
+                      <a:prstDash val="solid"/>
+                      <a:round/>
+                      <a:headEnd type="none" w="med" len="med"/>
+                      <a:tailEnd type="none" w="med" len="med"/>
+                    </a:lnR>
+                    <a:lnT w="12700" cap="flat" cmpd="sng" algn="ctr">
+                      <a:solidFill>
+                        <a:srgbClr val="161D28"/>
+                      </a:solidFill>
+                      <a:prstDash val="solid"/>
+                      <a:round/>
+                      <a:headEnd type="none" w="med" len="med"/>
+                      <a:tailEnd type="none" w="med" len="med"/>
+                    </a:lnT>
+                    <a:lnB w="12700" cap="flat" cmpd="sng" algn="ctr">
+                      <a:solidFill>
+                        <a:srgbClr val="CAC9C6"/>
+                      </a:solidFill>
+                      <a:prstDash val="solid"/>
+                      <a:round/>
+                      <a:headEnd type="none" w="med" len="med"/>
+                      <a:tailEnd type="none" w="med" len="med"/>
+                    </a:lnB>
+                    <a:solidFill>
+                      <a:srgbClr val="FDFCF9"/>
+                    </a:solidFill>
+                  </a:tcPr>
+                </a:tc>
+                <a:tc>
+                  <a:txBody>
+                    <a:bodyPr/>
+                    <a:lstStyle/>
+                    <a:p>
+                      <a:pPr indent="0" marL="0">
+                        <a:lnSpc>
+                          <a:spcPts val="1654"/>
+                        </a:lnSpc>
+                        <a:buNone/>
+                      </a:pPr>
+                      <a:r>
+                        <a:rPr lang="en-US" sz="1181" dirty="0">
+                          <a:solidFill>
+                            <a:srgbClr val="16202E"/>
+                          </a:solidFill>
+                          <a:latin typeface="IBM Plex Sans" pitchFamily="34" charset="0"/>
+                          <a:ea typeface="IBM Plex Sans" pitchFamily="34" charset="-122"/>
+                          <a:cs typeface="IBM Plex Sans" pitchFamily="34" charset="-120"/>
+                        </a:rPr>
+                        <a:t>BSD-3-Clause</a:t>
+                      </a:r>
+                      <a:endParaRPr lang="en-US" sz="1181" dirty="0">
+                        <a:latin typeface="IBM Plex Sans" charset="0"/>
+                        <a:ea typeface="IBM Plex Sans" charset="0"/>
+                        <a:cs typeface="IBM Plex Sans" charset="0"/>
+                      </a:endParaRPr>
+                    </a:p>
+                  </a:txBody>
+                  <a:tcPr marL="52507" marR="52507" marT="52507" marB="52507" anchor="t">
+                    <a:lnL w="12700" cap="flat" cmpd="sng" algn="ctr">
+                      <a:solidFill>
+                        <a:srgbClr val="CAC9C6"/>
+                      </a:solidFill>
+                      <a:prstDash val="solid"/>
+                      <a:round/>
+                      <a:headEnd type="none" w="med" len="med"/>
+                      <a:tailEnd type="none" w="med" len="med"/>
+                    </a:lnL>
+                    <a:lnR w="12700" cap="flat" cmpd="sng" algn="ctr">
+                      <a:solidFill>
+                        <a:srgbClr val="CAC9C6"/>
+                      </a:solidFill>
+                      <a:prstDash val="solid"/>
+                      <a:round/>
+                      <a:headEnd type="none" w="med" len="med"/>
+                      <a:tailEnd type="none" w="med" len="med"/>
+                    </a:lnR>
+                    <a:lnT w="12700" cap="flat" cmpd="sng" algn="ctr">
+                      <a:solidFill>
+                        <a:srgbClr val="161D28"/>
+                      </a:solidFill>
+                      <a:prstDash val="solid"/>
+                      <a:round/>
+                      <a:headEnd type="none" w="med" len="med"/>
+                      <a:tailEnd type="none" w="med" len="med"/>
+                    </a:lnT>
+                    <a:lnB w="12700" cap="flat" cmpd="sng" algn="ctr">
+                      <a:solidFill>
+                        <a:srgbClr val="CAC9C6"/>
+                      </a:solidFill>
+                      <a:prstDash val="solid"/>
+                      <a:round/>
+                      <a:headEnd type="none" w="med" len="med"/>
+                      <a:tailEnd type="none" w="med" len="med"/>
+                    </a:lnB>
+                    <a:solidFill>
+                      <a:srgbClr val="FDFCF9"/>
+                    </a:solidFill>
+                  </a:tcPr>
+                </a:tc>
+                <a:tc>
+                  <a:txBody>
+                    <a:bodyPr/>
+                    <a:lstStyle/>
+                    <a:p>
+                      <a:pPr indent="0" marL="0">
+                        <a:lnSpc>
+                          <a:spcPts val="1654"/>
+                        </a:lnSpc>
+                        <a:buNone/>
+                      </a:pPr>
+                      <a:r>
+                        <a:rPr lang="en-US" sz="1181" dirty="0">
+                          <a:solidFill>
+                            <a:srgbClr val="16202E"/>
+                          </a:solidFill>
+                          <a:latin typeface="IBM Plex Sans" pitchFamily="34" charset="0"/>
+                          <a:ea typeface="IBM Plex Sans" pitchFamily="34" charset="-122"/>
+                          <a:cs typeface="IBM Plex Sans" pitchFamily="34" charset="-120"/>
+                        </a:rPr>
+                        <a:t>использовать, изменять, распространять — в том числе в коммерческом продукте; сохранять копирайт</a:t>
+                      </a:r>
+                      <a:endParaRPr lang="en-US" sz="1181" dirty="0">
+                        <a:latin typeface="IBM Plex Sans" charset="0"/>
+                        <a:ea typeface="IBM Plex Sans" charset="0"/>
+                        <a:cs typeface="IBM Plex Sans" charset="0"/>
+                      </a:endParaRPr>
+                    </a:p>
+                  </a:txBody>
+                  <a:tcPr marL="52507" marR="52507" marT="52507" marB="52507" anchor="t">
+                    <a:lnL w="12700" cap="flat" cmpd="sng" algn="ctr">
+                      <a:solidFill>
+                        <a:srgbClr val="CAC9C6"/>
+                      </a:solidFill>
+                      <a:prstDash val="solid"/>
+                      <a:round/>
+                      <a:headEnd type="none" w="med" len="med"/>
+                      <a:tailEnd type="none" w="med" len="med"/>
+                    </a:lnL>
+                    <a:lnR w="12700" cap="flat" cmpd="sng" algn="ctr">
+                      <a:solidFill>
+                        <a:srgbClr val="CAC9C6"/>
+                      </a:solidFill>
+                      <a:prstDash val="solid"/>
+                      <a:round/>
+                      <a:headEnd type="none" w="med" len="med"/>
+                      <a:tailEnd type="none" w="med" len="med"/>
+                    </a:lnR>
+                    <a:lnT w="12700" cap="flat" cmpd="sng" algn="ctr">
+                      <a:solidFill>
+                        <a:srgbClr val="161D28"/>
+                      </a:solidFill>
+                      <a:prstDash val="solid"/>
+                      <a:round/>
+                      <a:headEnd type="none" w="med" len="med"/>
+                      <a:tailEnd type="none" w="med" len="med"/>
+                    </a:lnT>
+                    <a:lnB w="12700" cap="flat" cmpd="sng" algn="ctr">
+                      <a:solidFill>
+                        <a:srgbClr val="CAC9C6"/>
+                      </a:solidFill>
+                      <a:prstDash val="solid"/>
+                      <a:round/>
+                      <a:headEnd type="none" w="med" len="med"/>
+                      <a:tailEnd type="none" w="med" len="med"/>
+                    </a:lnB>
+                    <a:solidFill>
+                      <a:srgbClr val="FDFCF9"/>
+                    </a:solidFill>
+                  </a:tcPr>
+                </a:tc>
+              </a:tr>
+              <a:tr h="538824">
+                <a:tc>
+                  <a:txBody>
+                    <a:bodyPr/>
+                    <a:lstStyle/>
+                    <a:p>
+                      <a:pPr indent="0" marL="0">
+                        <a:lnSpc>
+                          <a:spcPts val="1654"/>
+                        </a:lnSpc>
+                        <a:buNone/>
+                      </a:pPr>
+                      <a:r>
+                        <a:rPr lang="en-US" sz="1181" dirty="0">
+                          <a:solidFill>
+                            <a:srgbClr val="16202E"/>
+                          </a:solidFill>
+                          <a:latin typeface="IBM Plex Sans" pitchFamily="34" charset="0"/>
+                          <a:ea typeface="IBM Plex Sans" pitchFamily="34" charset="-122"/>
+                          <a:cs typeface="IBM Plex Sans" pitchFamily="34" charset="-120"/>
+                        </a:rPr>
+                        <a:t>First Impressions V2 — данные, на них обучена AMLAI 1.0</a:t>
+                      </a:r>
+                      <a:endParaRPr lang="en-US" sz="1181" dirty="0">
+                        <a:latin typeface="IBM Plex Sans" charset="0"/>
+                        <a:ea typeface="IBM Plex Sans" charset="0"/>
+                        <a:cs typeface="IBM Plex Sans" charset="0"/>
+                      </a:endParaRPr>
+                    </a:p>
+                  </a:txBody>
+                  <a:tcPr marL="52507" marR="52507" marT="52507" marB="52507" anchor="t">
+                    <a:lnL w="0" cap="flat" cmpd="sng" algn="ctr">
+                      <a:noFill/>
+                    </a:lnL>
+                    <a:lnR w="12700" cap="flat" cmpd="sng" algn="ctr">
+                      <a:solidFill>
+                        <a:srgbClr val="C0BFBB"/>
+                      </a:solidFill>
+                      <a:prstDash val="solid"/>
+                      <a:round/>
+                      <a:headEnd type="none" w="med" len="med"/>
+                      <a:tailEnd type="none" w="med" len="med"/>
+                    </a:lnR>
+                    <a:lnT w="12700" cap="flat" cmpd="sng" algn="ctr">
+                      <a:solidFill>
+                        <a:srgbClr val="CAC9C6"/>
+                      </a:solidFill>
+                      <a:prstDash val="solid"/>
+                      <a:round/>
+                      <a:headEnd type="none" w="med" len="med"/>
+                      <a:tailEnd type="none" w="med" len="med"/>
+                    </a:lnT>
+                    <a:lnB w="12700" cap="flat" cmpd="sng" algn="ctr">
+                      <a:solidFill>
+                        <a:srgbClr val="C0BFBB"/>
+                      </a:solidFill>
+                      <a:prstDash val="solid"/>
+                      <a:round/>
+                      <a:headEnd type="none" w="med" len="med"/>
+                      <a:tailEnd type="none" w="med" len="med"/>
+                    </a:lnB>
+                    <a:solidFill>
+                      <a:srgbClr val="F1EFEA"/>
+                    </a:solidFill>
+                  </a:tcPr>
+                </a:tc>
+                <a:tc>
+                  <a:txBody>
+                    <a:bodyPr/>
+                    <a:lstStyle/>
+                    <a:p>
+                      <a:pPr indent="0" marL="0">
+                        <a:lnSpc>
+                          <a:spcPts val="1654"/>
+                        </a:lnSpc>
+                        <a:buNone/>
+                      </a:pPr>
+                      <a:r>
+                        <a:rPr lang="en-US" sz="1181" dirty="0">
+                          <a:solidFill>
+                            <a:srgbClr val="16202E"/>
+                          </a:solidFill>
+                          <a:latin typeface="IBM Plex Sans" pitchFamily="34" charset="0"/>
+                          <a:ea typeface="IBM Plex Sans" pitchFamily="34" charset="-122"/>
+                          <a:cs typeface="IBM Plex Sans" pitchFamily="34" charset="-120"/>
+                        </a:rPr>
+                        <a:t>CC BY-NC 4.0</a:t>
+                      </a:r>
+                      <a:endParaRPr lang="en-US" sz="1181" dirty="0">
+                        <a:latin typeface="IBM Plex Sans" charset="0"/>
+                        <a:ea typeface="IBM Plex Sans" charset="0"/>
+                        <a:cs typeface="IBM Plex Sans" charset="0"/>
+                      </a:endParaRPr>
+                    </a:p>
+                  </a:txBody>
+                  <a:tcPr marL="52507" marR="52507" marT="52507" marB="52507" anchor="t">
+                    <a:lnL w="12700" cap="flat" cmpd="sng" algn="ctr">
+                      <a:solidFill>
+                        <a:srgbClr val="C0BFBB"/>
+                      </a:solidFill>
+                      <a:prstDash val="solid"/>
+                      <a:round/>
+                      <a:headEnd type="none" w="med" len="med"/>
+                      <a:tailEnd type="none" w="med" len="med"/>
+                    </a:lnL>
+                    <a:lnR w="12700" cap="flat" cmpd="sng" algn="ctr">
+                      <a:solidFill>
+                        <a:srgbClr val="C0BFBB"/>
+                      </a:solidFill>
+                      <a:prstDash val="solid"/>
+                      <a:round/>
+                      <a:headEnd type="none" w="med" len="med"/>
+                      <a:tailEnd type="none" w="med" len="med"/>
+                    </a:lnR>
+                    <a:lnT w="12700" cap="flat" cmpd="sng" algn="ctr">
+                      <a:solidFill>
+                        <a:srgbClr val="CAC9C6"/>
+                      </a:solidFill>
+                      <a:prstDash val="solid"/>
+                      <a:round/>
+                      <a:headEnd type="none" w="med" len="med"/>
+                      <a:tailEnd type="none" w="med" len="med"/>
+                    </a:lnT>
+                    <a:lnB w="12700" cap="flat" cmpd="sng" algn="ctr">
+                      <a:solidFill>
+                        <a:srgbClr val="C0BFBB"/>
+                      </a:solidFill>
+                      <a:prstDash val="solid"/>
+                      <a:round/>
+                      <a:headEnd type="none" w="med" len="med"/>
+                      <a:tailEnd type="none" w="med" len="med"/>
+                    </a:lnB>
+                    <a:solidFill>
+                      <a:srgbClr val="F1EFEA"/>
+                    </a:solidFill>
+                  </a:tcPr>
+                </a:tc>
+                <a:tc>
+                  <a:txBody>
+                    <a:bodyPr/>
+                    <a:lstStyle/>
+                    <a:p>
+                      <a:pPr indent="0" marL="0">
+                        <a:lnSpc>
+                          <a:spcPts val="1654"/>
+                        </a:lnSpc>
+                        <a:buNone/>
+                      </a:pPr>
+                      <a:r>
+                        <a:rPr lang="en-US" sz="1181" dirty="0">
+                          <a:solidFill>
+                            <a:srgbClr val="16202E"/>
+                          </a:solidFill>
+                          <a:latin typeface="IBM Plex Sans" pitchFamily="34" charset="0"/>
+                          <a:ea typeface="IBM Plex Sans" pitchFamily="34" charset="-122"/>
+                          <a:cs typeface="IBM Plex Sans" pitchFamily="34" charset="-120"/>
+                        </a:rPr>
+                        <a:t>использовать, изменять, делиться — с указанием авторства, только некоммерчески</a:t>
+                      </a:r>
+                      <a:endParaRPr lang="en-US" sz="1181" dirty="0">
+                        <a:latin typeface="IBM Plex Sans" charset="0"/>
+                        <a:ea typeface="IBM Plex Sans" charset="0"/>
+                        <a:cs typeface="IBM Plex Sans" charset="0"/>
+                      </a:endParaRPr>
+                    </a:p>
+                  </a:txBody>
+                  <a:tcPr marL="52507" marR="52507" marT="52507" marB="52507" anchor="t">
+                    <a:lnL w="12700" cap="flat" cmpd="sng" algn="ctr">
+                      <a:solidFill>
+                        <a:srgbClr val="C0BFBB"/>
+                      </a:solidFill>
+                      <a:prstDash val="solid"/>
+                      <a:round/>
+                      <a:headEnd type="none" w="med" len="med"/>
+                      <a:tailEnd type="none" w="med" len="med"/>
+                    </a:lnL>
+                    <a:lnR w="12700" cap="flat" cmpd="sng" algn="ctr">
+                      <a:solidFill>
+                        <a:srgbClr val="C0BFBB"/>
+                      </a:solidFill>
+                      <a:prstDash val="solid"/>
+                      <a:round/>
+                      <a:headEnd type="none" w="med" len="med"/>
+                      <a:tailEnd type="none" w="med" len="med"/>
+                    </a:lnR>
+                    <a:lnT w="12700" cap="flat" cmpd="sng" algn="ctr">
+                      <a:solidFill>
+                        <a:srgbClr val="CAC9C6"/>
+                      </a:solidFill>
+                      <a:prstDash val="solid"/>
+                      <a:round/>
+                      <a:headEnd type="none" w="med" len="med"/>
+                      <a:tailEnd type="none" w="med" len="med"/>
+                    </a:lnT>
+                    <a:lnB w="12700" cap="flat" cmpd="sng" algn="ctr">
+                      <a:solidFill>
+                        <a:srgbClr val="C0BFBB"/>
+                      </a:solidFill>
+                      <a:prstDash val="solid"/>
+                      <a:round/>
+                      <a:headEnd type="none" w="med" len="med"/>
+                      <a:tailEnd type="none" w="med" len="med"/>
+                    </a:lnB>
+                    <a:solidFill>
+                      <a:srgbClr val="F1EFEA"/>
+                    </a:solidFill>
+                  </a:tcPr>
+                </a:tc>
+              </a:tr>
+              <a:tr h="538824">
+                <a:tc>
+                  <a:txBody>
+                    <a:bodyPr/>
+                    <a:lstStyle/>
+                    <a:p>
+                      <a:pPr indent="0" marL="0">
+                        <a:lnSpc>
+                          <a:spcPts val="1654"/>
+                        </a:lnSpc>
+                        <a:buNone/>
+                      </a:pPr>
+                      <a:r>
+                        <a:rPr lang="en-US" sz="1181" dirty="0">
+                          <a:solidFill>
+                            <a:srgbClr val="16202E"/>
+                          </a:solidFill>
+                          <a:latin typeface="IBM Plex Sans" pitchFamily="34" charset="0"/>
+                          <a:ea typeface="IBM Plex Sans" pitchFamily="34" charset="-122"/>
+                          <a:cs typeface="IBM Plex Sans" pitchFamily="34" charset="-120"/>
+                        </a:rPr>
+                        <a:t>MuPTA — русский корпус (веса OCEAN-AI для русской речи)</a:t>
+                      </a:r>
+                      <a:endParaRPr lang="en-US" sz="1181" dirty="0">
+                        <a:latin typeface="IBM Plex Sans" charset="0"/>
+                        <a:ea typeface="IBM Plex Sans" charset="0"/>
+                        <a:cs typeface="IBM Plex Sans" charset="0"/>
+                      </a:endParaRPr>
+                    </a:p>
+                  </a:txBody>
+                  <a:tcPr marL="52507" marR="52507" marT="52507" marB="52507" anchor="t">
+                    <a:lnL w="0" cap="flat" cmpd="sng" algn="ctr">
+                      <a:noFill/>
+                    </a:lnL>
+                    <a:lnR w="12700" cap="flat" cmpd="sng" algn="ctr">
+                      <a:solidFill>
+                        <a:srgbClr val="CAC9C6"/>
+                      </a:solidFill>
+                      <a:prstDash val="solid"/>
+                      <a:round/>
+                      <a:headEnd type="none" w="med" len="med"/>
+                      <a:tailEnd type="none" w="med" len="med"/>
+                    </a:lnR>
+                    <a:lnT w="12700" cap="flat" cmpd="sng" algn="ctr">
+                      <a:solidFill>
+                        <a:srgbClr val="C0BFBB"/>
+                      </a:solidFill>
+                      <a:prstDash val="solid"/>
+                      <a:round/>
+                      <a:headEnd type="none" w="med" len="med"/>
+                      <a:tailEnd type="none" w="med" len="med"/>
+                    </a:lnT>
+                    <a:lnB w="12700" cap="flat" cmpd="sng" algn="ctr">
+                      <a:solidFill>
+                        <a:srgbClr val="CAC9C6"/>
+                      </a:solidFill>
+                      <a:prstDash val="solid"/>
+                      <a:round/>
+                      <a:headEnd type="none" w="med" len="med"/>
+                      <a:tailEnd type="none" w="med" len="med"/>
+                    </a:lnB>
+                    <a:solidFill>
+                      <a:srgbClr val="FDFCF9"/>
+                    </a:solidFill>
+                  </a:tcPr>
+                </a:tc>
+                <a:tc>
+                  <a:txBody>
+                    <a:bodyPr/>
+                    <a:lstStyle/>
+                    <a:p>
+                      <a:pPr indent="0" marL="0">
+                        <a:lnSpc>
+                          <a:spcPts val="1654"/>
+                        </a:lnSpc>
+                        <a:buNone/>
+                      </a:pPr>
+                      <a:r>
+                        <a:rPr lang="en-US" sz="1181" dirty="0">
+                          <a:solidFill>
+                            <a:srgbClr val="16202E"/>
+                          </a:solidFill>
+                          <a:latin typeface="IBM Plex Sans" pitchFamily="34" charset="0"/>
+                          <a:ea typeface="IBM Plex Sans" pitchFamily="34" charset="-122"/>
+                          <a:cs typeface="IBM Plex Sans" pitchFamily="34" charset="-120"/>
+                        </a:rPr>
+                        <a:t>по запросу, только исследования</a:t>
+                      </a:r>
+                      <a:endParaRPr lang="en-US" sz="1181" dirty="0">
+                        <a:latin typeface="IBM Plex Sans" charset="0"/>
+                        <a:ea typeface="IBM Plex Sans" charset="0"/>
+                        <a:cs typeface="IBM Plex Sans" charset="0"/>
+                      </a:endParaRPr>
+                    </a:p>
+                  </a:txBody>
+                  <a:tcPr marL="52507" marR="52507" marT="52507" marB="52507" anchor="t">
+                    <a:lnL w="12700" cap="flat" cmpd="sng" algn="ctr">
+                      <a:solidFill>
+                        <a:srgbClr val="CAC9C6"/>
+                      </a:solidFill>
+                      <a:prstDash val="solid"/>
+                      <a:round/>
+                      <a:headEnd type="none" w="med" len="med"/>
+                      <a:tailEnd type="none" w="med" len="med"/>
+                    </a:lnL>
+                    <a:lnR w="12700" cap="flat" cmpd="sng" algn="ctr">
+                      <a:solidFill>
+                        <a:srgbClr val="CAC9C6"/>
+                      </a:solidFill>
+                      <a:prstDash val="solid"/>
+                      <a:round/>
+                      <a:headEnd type="none" w="med" len="med"/>
+                      <a:tailEnd type="none" w="med" len="med"/>
+                    </a:lnR>
+                    <a:lnT w="12700" cap="flat" cmpd="sng" algn="ctr">
+                      <a:solidFill>
+                        <a:srgbClr val="C0BFBB"/>
+                      </a:solidFill>
+                      <a:prstDash val="solid"/>
+                      <a:round/>
+                      <a:headEnd type="none" w="med" len="med"/>
+                      <a:tailEnd type="none" w="med" len="med"/>
+                    </a:lnT>
+                    <a:lnB w="12700" cap="flat" cmpd="sng" algn="ctr">
+                      <a:solidFill>
+                        <a:srgbClr val="CAC9C6"/>
+                      </a:solidFill>
+                      <a:prstDash val="solid"/>
+                      <a:round/>
+                      <a:headEnd type="none" w="med" len="med"/>
+                      <a:tailEnd type="none" w="med" len="med"/>
+                    </a:lnB>
+                    <a:solidFill>
+                      <a:srgbClr val="FDFCF9"/>
+                    </a:solidFill>
+                  </a:tcPr>
+                </a:tc>
+                <a:tc>
+                  <a:txBody>
+                    <a:bodyPr/>
+                    <a:lstStyle/>
+                    <a:p>
+                      <a:pPr indent="0" marL="0">
+                        <a:lnSpc>
+                          <a:spcPts val="1654"/>
+                        </a:lnSpc>
+                        <a:buNone/>
+                      </a:pPr>
+                      <a:r>
+                        <a:rPr lang="en-US" sz="1181" dirty="0">
+                          <a:solidFill>
+                            <a:srgbClr val="16202E"/>
+                          </a:solidFill>
+                          <a:latin typeface="IBM Plex Sans" pitchFamily="34" charset="0"/>
+                          <a:ea typeface="IBM Plex Sans" pitchFamily="34" charset="-122"/>
+                          <a:cs typeface="IBM Plex Sans" pitchFamily="34" charset="-120"/>
+                        </a:rPr>
+                        <a:t>доступ по заявке авторам; некоммерческое, научное использование</a:t>
+                      </a:r>
+                      <a:endParaRPr lang="en-US" sz="1181" dirty="0">
+                        <a:latin typeface="IBM Plex Sans" charset="0"/>
+                        <a:ea typeface="IBM Plex Sans" charset="0"/>
+                        <a:cs typeface="IBM Plex Sans" charset="0"/>
+                      </a:endParaRPr>
+                    </a:p>
+                  </a:txBody>
+                  <a:tcPr marL="52507" marR="52507" marT="52507" marB="52507" anchor="t">
+                    <a:lnL w="12700" cap="flat" cmpd="sng" algn="ctr">
+                      <a:solidFill>
+                        <a:srgbClr val="CAC9C6"/>
+                      </a:solidFill>
+                      <a:prstDash val="solid"/>
+                      <a:round/>
+                      <a:headEnd type="none" w="med" len="med"/>
+                      <a:tailEnd type="none" w="med" len="med"/>
+                    </a:lnL>
+                    <a:lnR w="12700" cap="flat" cmpd="sng" algn="ctr">
+                      <a:solidFill>
+                        <a:srgbClr val="CAC9C6"/>
+                      </a:solidFill>
+                      <a:prstDash val="solid"/>
+                      <a:round/>
+                      <a:headEnd type="none" w="med" len="med"/>
+                      <a:tailEnd type="none" w="med" len="med"/>
+                    </a:lnR>
+                    <a:lnT w="12700" cap="flat" cmpd="sng" algn="ctr">
+                      <a:solidFill>
+                        <a:srgbClr val="C0BFBB"/>
+                      </a:solidFill>
+                      <a:prstDash val="solid"/>
+                      <a:round/>
+                      <a:headEnd type="none" w="med" len="med"/>
+                      <a:tailEnd type="none" w="med" len="med"/>
+                    </a:lnT>
+                    <a:lnB w="12700" cap="flat" cmpd="sng" algn="ctr">
+                      <a:solidFill>
+                        <a:srgbClr val="CAC9C6"/>
+                      </a:solidFill>
+                      <a:prstDash val="solid"/>
+                      <a:round/>
+                      <a:headEnd type="none" w="med" len="med"/>
+                      <a:tailEnd type="none" w="med" len="med"/>
+                    </a:lnB>
+                    <a:solidFill>
+                      <a:srgbClr val="FDFCF9"/>
+                    </a:solidFill>
+                  </a:tcPr>
+                </a:tc>
+              </a:tr>
+              <a:tr h="538824">
+                <a:tc>
+                  <a:txBody>
+                    <a:bodyPr/>
+                    <a:lstStyle/>
+                    <a:p>
+                      <a:pPr indent="0" marL="0">
+                        <a:lnSpc>
+                          <a:spcPts val="1654"/>
+                        </a:lnSpc>
+                        <a:buNone/>
+                      </a:pPr>
+                      <a:r>
+                        <a:rPr lang="en-US" sz="1181" dirty="0">
+                          <a:solidFill>
+                            <a:srgbClr val="16202E"/>
+                          </a:solidFill>
+                          <a:latin typeface="IBM Plex Sans" pitchFamily="34" charset="0"/>
+                          <a:ea typeface="IBM Plex Sans" pitchFamily="34" charset="-122"/>
+                          <a:cs typeface="IBM Plex Sans" pitchFamily="34" charset="-120"/>
+                        </a:rPr>
+                        <a:t>Кодировщики: CLIP, CLAP, Whisper, Qwen-VL, ViT, MediaPipe</a:t>
+                      </a:r>
+                      <a:endParaRPr lang="en-US" sz="1181" dirty="0">
+                        <a:latin typeface="IBM Plex Sans" charset="0"/>
+                        <a:ea typeface="IBM Plex Sans" charset="0"/>
+                        <a:cs typeface="IBM Plex Sans" charset="0"/>
+                      </a:endParaRPr>
+                    </a:p>
+                  </a:txBody>
+                  <a:tcPr marL="52507" marR="52507" marT="52507" marB="52507" anchor="t">
+                    <a:lnL w="0" cap="flat" cmpd="sng" algn="ctr">
+                      <a:noFill/>
+                    </a:lnL>
+                    <a:lnR w="12700" cap="flat" cmpd="sng" algn="ctr">
+                      <a:solidFill>
+                        <a:srgbClr val="C0BFBB"/>
+                      </a:solidFill>
+                      <a:prstDash val="solid"/>
+                      <a:round/>
+                      <a:headEnd type="none" w="med" len="med"/>
+                      <a:tailEnd type="none" w="med" len="med"/>
+                    </a:lnR>
+                    <a:lnT w="12700" cap="flat" cmpd="sng" algn="ctr">
+                      <a:solidFill>
+                        <a:srgbClr val="CAC9C6"/>
+                      </a:solidFill>
+                      <a:prstDash val="solid"/>
+                      <a:round/>
+                      <a:headEnd type="none" w="med" len="med"/>
+                      <a:tailEnd type="none" w="med" len="med"/>
+                    </a:lnT>
+                    <a:lnB w="12700" cap="flat" cmpd="sng" algn="ctr">
+                      <a:solidFill>
+                        <a:srgbClr val="C0BFBB"/>
+                      </a:solidFill>
+                      <a:prstDash val="solid"/>
+                      <a:round/>
+                      <a:headEnd type="none" w="med" len="med"/>
+                      <a:tailEnd type="none" w="med" len="med"/>
+                    </a:lnB>
+                    <a:solidFill>
+                      <a:srgbClr val="F1EFEA"/>
+                    </a:solidFill>
+                  </a:tcPr>
+                </a:tc>
+                <a:tc>
+                  <a:txBody>
+                    <a:bodyPr/>
+                    <a:lstStyle/>
+                    <a:p>
+                      <a:pPr indent="0" marL="0">
+                        <a:lnSpc>
+                          <a:spcPts val="1654"/>
+                        </a:lnSpc>
+                        <a:buNone/>
+                      </a:pPr>
+                      <a:r>
+                        <a:rPr lang="en-US" sz="1181" dirty="0">
+                          <a:solidFill>
+                            <a:srgbClr val="16202E"/>
+                          </a:solidFill>
+                          <a:latin typeface="IBM Plex Sans" pitchFamily="34" charset="0"/>
+                          <a:ea typeface="IBM Plex Sans" pitchFamily="34" charset="-122"/>
+                          <a:cs typeface="IBM Plex Sans" pitchFamily="34" charset="-120"/>
+                        </a:rPr>
+                        <a:t>MIT / Apache-2.0</a:t>
+                      </a:r>
+                      <a:endParaRPr lang="en-US" sz="1181" dirty="0">
+                        <a:latin typeface="IBM Plex Sans" charset="0"/>
+                        <a:ea typeface="IBM Plex Sans" charset="0"/>
+                        <a:cs typeface="IBM Plex Sans" charset="0"/>
+                      </a:endParaRPr>
+                    </a:p>
+                  </a:txBody>
+                  <a:tcPr marL="52507" marR="52507" marT="52507" marB="52507" anchor="t">
+                    <a:lnL w="12700" cap="flat" cmpd="sng" algn="ctr">
+                      <a:solidFill>
+                        <a:srgbClr val="C0BFBB"/>
+                      </a:solidFill>
+                      <a:prstDash val="solid"/>
+                      <a:round/>
+                      <a:headEnd type="none" w="med" len="med"/>
+                      <a:tailEnd type="none" w="med" len="med"/>
+                    </a:lnL>
+                    <a:lnR w="12700" cap="flat" cmpd="sng" algn="ctr">
+                      <a:solidFill>
+                        <a:srgbClr val="C0BFBB"/>
+                      </a:solidFill>
+                      <a:prstDash val="solid"/>
+                      <a:round/>
+                      <a:headEnd type="none" w="med" len="med"/>
+                      <a:tailEnd type="none" w="med" len="med"/>
+                    </a:lnR>
+                    <a:lnT w="12700" cap="flat" cmpd="sng" algn="ctr">
+                      <a:solidFill>
+                        <a:srgbClr val="CAC9C6"/>
+                      </a:solidFill>
+                      <a:prstDash val="solid"/>
+                      <a:round/>
+                      <a:headEnd type="none" w="med" len="med"/>
+                      <a:tailEnd type="none" w="med" len="med"/>
+                    </a:lnT>
+                    <a:lnB w="12700" cap="flat" cmpd="sng" algn="ctr">
+                      <a:solidFill>
+                        <a:srgbClr val="C0BFBB"/>
+                      </a:solidFill>
+                      <a:prstDash val="solid"/>
+                      <a:round/>
+                      <a:headEnd type="none" w="med" len="med"/>
+                      <a:tailEnd type="none" w="med" len="med"/>
+                    </a:lnB>
+                    <a:solidFill>
+                      <a:srgbClr val="F1EFEA"/>
+                    </a:solidFill>
+                  </a:tcPr>
+                </a:tc>
+                <a:tc>
+                  <a:txBody>
+                    <a:bodyPr/>
+                    <a:lstStyle/>
+                    <a:p>
+                      <a:pPr indent="0" marL="0">
+                        <a:lnSpc>
+                          <a:spcPts val="1654"/>
+                        </a:lnSpc>
+                        <a:buNone/>
+                      </a:pPr>
+                      <a:r>
+                        <a:rPr lang="en-US" sz="1181" dirty="0">
+                          <a:solidFill>
+                            <a:srgbClr val="16202E"/>
+                          </a:solidFill>
+                          <a:latin typeface="IBM Plex Sans" pitchFamily="34" charset="0"/>
+                          <a:ea typeface="IBM Plex Sans" pitchFamily="34" charset="-122"/>
+                          <a:cs typeface="IBM Plex Sans" pitchFamily="34" charset="-120"/>
+                        </a:rPr>
+                        <a:t>свободно, в том числе коммерчески; но голос (wav2vec2) и openSMILE — некоммерчески</a:t>
+                      </a:r>
+                      <a:endParaRPr lang="en-US" sz="1181" dirty="0">
+                        <a:latin typeface="IBM Plex Sans" charset="0"/>
+                        <a:ea typeface="IBM Plex Sans" charset="0"/>
+                        <a:cs typeface="IBM Plex Sans" charset="0"/>
+                      </a:endParaRPr>
+                    </a:p>
+                  </a:txBody>
+                  <a:tcPr marL="52507" marR="52507" marT="52507" marB="52507" anchor="t">
+                    <a:lnL w="12700" cap="flat" cmpd="sng" algn="ctr">
+                      <a:solidFill>
+                        <a:srgbClr val="C0BFBB"/>
+                      </a:solidFill>
+                      <a:prstDash val="solid"/>
+                      <a:round/>
+                      <a:headEnd type="none" w="med" len="med"/>
+                      <a:tailEnd type="none" w="med" len="med"/>
+                    </a:lnL>
+                    <a:lnR w="12700" cap="flat" cmpd="sng" algn="ctr">
+                      <a:solidFill>
+                        <a:srgbClr val="C0BFBB"/>
+                      </a:solidFill>
+                      <a:prstDash val="solid"/>
+                      <a:round/>
+                      <a:headEnd type="none" w="med" len="med"/>
+                      <a:tailEnd type="none" w="med" len="med"/>
+                    </a:lnR>
+                    <a:lnT w="12700" cap="flat" cmpd="sng" algn="ctr">
+                      <a:solidFill>
+                        <a:srgbClr val="CAC9C6"/>
+                      </a:solidFill>
+                      <a:prstDash val="solid"/>
+                      <a:round/>
+                      <a:headEnd type="none" w="med" len="med"/>
+                      <a:tailEnd type="none" w="med" len="med"/>
+                    </a:lnT>
+                    <a:lnB w="12700" cap="flat" cmpd="sng" algn="ctr">
+                      <a:solidFill>
+                        <a:srgbClr val="C0BFBB"/>
+                      </a:solidFill>
+                      <a:prstDash val="solid"/>
+                      <a:round/>
+                      <a:headEnd type="none" w="med" len="med"/>
+                      <a:tailEnd type="none" w="med" len="med"/>
+                    </a:lnB>
+                    <a:solidFill>
+                      <a:srgbClr val="F1EFEA"/>
+                    </a:solidFill>
+                  </a:tcPr>
+                </a:tc>
+              </a:tr>
+            </a:tbl>
+          </a:graphicData>
+        </a:graphic>
+      </p:graphicFrame>
+      <p:sp>
+        <p:nvSpPr>
+          <p:cNvPr id="7" name="Shape 4"/>
+          <p:cNvSpPr/>
+          <p:nvPr/>
+        </p:nvSpPr>
+        <p:spPr>
+          <a:xfrm>
+            <a:off x="812800" y="4712692"/>
+            <a:ext cx="10566400" cy="1129308"/>
+          </a:xfrm>
+          <a:prstGeom prst="roundRect">
+            <a:avLst>
+              <a:gd name="adj" fmla="val 8997"/>
+            </a:avLst>
+          </a:prstGeom>
+          <a:solidFill>
+            <a:srgbClr val="16202E"/>
+          </a:solidFill>
+          <a:ln/>
+        </p:spPr>
+      </p:sp>
+      <p:sp>
+        <p:nvSpPr>
+          <p:cNvPr id="8" name="Text 5"/>
+          <p:cNvSpPr/>
+          <p:nvPr/>
+        </p:nvSpPr>
+        <p:spPr>
+          <a:xfrm>
+            <a:off x="977900" y="4852392"/>
+            <a:ext cx="10543286" cy="431337"/>
+          </a:xfrm>
+          <a:prstGeom prst="rect">
+            <a:avLst/>
+          </a:prstGeom>
+          <a:noFill/>
+          <a:ln/>
+        </p:spPr>
+        <p:txBody>
+          <a:bodyPr wrap="square" lIns="0" tIns="0" rIns="0" bIns="0" rtlCol="0" anchor="t">
+            <a:normAutofit/>
+          </a:bodyPr>
+          <a:lstStyle/>
+          <a:p>
+            <a:pPr algn="l" indent="0" marL="0">
+              <a:lnSpc>
+                <a:spcPts val="1610"/>
+              </a:lnSpc>
+              <a:buNone/>
+            </a:pPr>
+            <a:r>
+              <a:rPr lang="en-US" sz="1193" b="1" dirty="0">
+                <a:solidFill>
+                  <a:srgbClr val="F2F0EA"/>
+                </a:solidFill>
+                <a:latin typeface="IBM Plex Sans" pitchFamily="34" charset="0"/>
+                <a:ea typeface="IBM Plex Sans" pitchFamily="34" charset="-122"/>
+                <a:cs typeface="IBM Plex Sans" pitchFamily="34" charset="-120"/>
+              </a:rPr>
+              <a:t>Итог:</a:t>
+            </a:r>
+            <a:r>
+              <a:rPr lang="en-US" sz="1193" dirty="0">
+                <a:solidFill>
+                  <a:srgbClr val="F2F0EA"/>
+                </a:solidFill>
+                <a:latin typeface="IBM Plex Sans" pitchFamily="34" charset="0"/>
+                <a:ea typeface="IBM Plex Sans" pitchFamily="34" charset="-122"/>
+                <a:cs typeface="IBM Plex Sans" pitchFamily="34" charset="-120"/>
+              </a:rPr>
+              <a:t> код можно использовать свободно, но оценки Big Five получены весами, обученными на некоммерческих данных (First Impressions V2 — CC BY-NC, MuPTA — только исследования).</a:t>
+            </a:r>
+            <a:endParaRPr lang="en-US" sz="1193" dirty="0"/>
+          </a:p>
+        </p:txBody>
+      </p:sp>
+      <p:sp>
+        <p:nvSpPr>
+          <p:cNvPr id="9" name="Text 6"/>
+          <p:cNvSpPr/>
+          <p:nvPr/>
+        </p:nvSpPr>
+        <p:spPr>
+          <a:xfrm>
+            <a:off x="977900" y="5296433"/>
+            <a:ext cx="10543286" cy="431271"/>
+          </a:xfrm>
+          <a:prstGeom prst="rect">
+            <a:avLst/>
+          </a:prstGeom>
+          <a:noFill/>
+          <a:ln/>
+        </p:spPr>
+        <p:txBody>
+          <a:bodyPr wrap="square" lIns="0" tIns="0" rIns="0" bIns="0" rtlCol="0" anchor="t">
+            <a:normAutofit/>
+          </a:bodyPr>
+          <a:lstStyle/>
+          <a:p>
+            <a:pPr algn="l" indent="0" marL="0">
+              <a:lnSpc>
+                <a:spcPts val="1610"/>
+              </a:lnSpc>
+              <a:buNone/>
+            </a:pPr>
+            <a:r>
+              <a:rPr lang="en-US" sz="1193" dirty="0">
+                <a:solidFill>
+                  <a:srgbClr val="C9D1DC"/>
+                </a:solidFill>
+                <a:latin typeface="IBM Plex Sans" pitchFamily="34" charset="0"/>
+                <a:ea typeface="IBM Plex Sans" pitchFamily="34" charset="-122"/>
+                <a:cs typeface="IBM Plex Sans" pitchFamily="34" charset="-120"/>
+              </a:rPr>
+              <a:t>Чтобы использовать систему коммерчески, нужен свой размеченный датасет — обучение на своих данных, которые можно использовать и изменять, снимает эти ограничения.</a:t>
+            </a:r>
+            <a:endParaRPr lang="en-US" sz="1193" dirty="0"/>
+          </a:p>
+        </p:txBody>
+      </p:sp>
+      <p:sp>
+        <p:nvSpPr>
+          <p:cNvPr id="10" name="Text 7"/>
+          <p:cNvSpPr/>
+          <p:nvPr/>
+        </p:nvSpPr>
+        <p:spPr>
+          <a:xfrm>
+            <a:off x="812800" y="6238280"/>
+            <a:ext cx="8502650" cy="238720"/>
+          </a:xfrm>
+          <a:prstGeom prst="rect">
+            <a:avLst/>
+          </a:prstGeom>
+          <a:noFill/>
+          <a:ln/>
+        </p:spPr>
+        <p:txBody>
+          <a:bodyPr wrap="square" lIns="0" tIns="0" rIns="0" bIns="0" rtlCol="0" anchor="t">
+            <a:normAutofit/>
+          </a:bodyPr>
+          <a:lstStyle/>
+          <a:p>
+            <a:pPr algn="l" indent="0" marL="0">
+              <a:lnSpc>
+                <a:spcPts val="1680"/>
+              </a:lnSpc>
+              <a:buNone/>
+            </a:pPr>
+            <a:r>
+              <a:rPr lang="en-US" sz="1200" dirty="0">
+                <a:solidFill>
+                  <a:srgbClr val="5B6472"/>
+                </a:solidFill>
+                <a:latin typeface="IBM Plex Sans" pitchFamily="34" charset="0"/>
+                <a:ea typeface="IBM Plex Sans" pitchFamily="34" charset="-122"/>
+                <a:cs typeface="IBM Plex Sans" pitchFamily="34" charset="-120"/>
+              </a:rPr>
+              <a:t>BS Profiler 3.1 · анализ человека по видео · © 2026 AMLAI</a:t>
+            </a:r>
+            <a:endParaRPr lang="en-US" sz="1200" dirty="0"/>
+          </a:p>
+        </p:txBody>
+      </p:sp>
+      <p:sp>
+        <p:nvSpPr>
+          <p:cNvPr id="11" name="Text 8"/>
+          <p:cNvSpPr/>
+          <p:nvPr/>
+        </p:nvSpPr>
+        <p:spPr>
+          <a:xfrm>
+            <a:off x="10566400" y="6238280"/>
+            <a:ext cx="812800" cy="238720"/>
+          </a:xfrm>
+          <a:prstGeom prst="rect">
+            <a:avLst/>
+          </a:prstGeom>
+          <a:noFill/>
+          <a:ln/>
+        </p:spPr>
+        <p:txBody>
+          <a:bodyPr wrap="square" lIns="0" tIns="0" rIns="0" bIns="0" rtlCol="0" anchor="t">
+            <a:normAutofit/>
+          </a:bodyPr>
+          <a:lstStyle/>
+          <a:p>
+            <a:pPr algn="r" indent="0" marL="0">
+              <a:lnSpc>
+                <a:spcPts val="1680"/>
+              </a:lnSpc>
+              <a:buNone/>
+            </a:pPr>
+            <a:r>
+              <a:rPr lang="en-US" sz="1200" dirty="0">
+                <a:solidFill>
+                  <a:srgbClr val="5B6472"/>
+                </a:solidFill>
+                <a:latin typeface="IBM Plex Sans" pitchFamily="34" charset="0"/>
+                <a:ea typeface="IBM Plex Sans" pitchFamily="34" charset="-122"/>
+                <a:cs typeface="IBM Plex Sans" pitchFamily="34" charset="-120"/>
+              </a:rPr>
+              <a:t>10</a:t>
+            </a:r>
+            <a:endParaRPr lang="en-US" sz="1200" dirty="0"/>
+          </a:p>
+        </p:txBody>
+      </p:sp>
+    </p:spTree>
+  </p:cSld>
+  <p:clrMapOvr>
+    <a:masterClrMapping/>
+  </p:clrMapOvr>
+</p:sld>
+</file>
+
 <file path=ppt/slides/slide2.xml><?xml version="1.0" encoding="utf-8"?>
 <p:sld xmlns:a="http://schemas.openxmlformats.org/drawingml/2006/main" xmlns:r="http://schemas.openxmlformats.org/officeDocument/2006/relationships" xmlns:p="http://schemas.openxmlformats.org/presentationml/2006/main">
   <p:cSld name="Slide 2">
